--- a/output/test_convert.pptx
+++ b/output/test_convert.pptx
@@ -6,6 +6,8 @@
   </p:sldMasterIdLst>
   <p:sldIdLst>
     <p:sldId id="256" r:id="rId7"/>
+    <p:sldId id="257" r:id="rId8"/>
+    <p:sldId id="258" r:id="rId9"/>
   </p:sldIdLst>
   <p:sldSz cx="12192000" cy="6858000" type="screen4x3"/>
   <p:notesSz cx="6858000" cy="9144000"/>
@@ -3103,7 +3105,7 @@
         </p:nvSpPr>
         <p:spPr>
           <a:xfrm>
-            <a:off x="0" y="0"/>
+            <a:off x="447675" y="447675"/>
             <a:ext cx="12192000" cy="6858000"/>
           </a:xfrm>
           <a:prstGeom prst="rect">
@@ -3119,14 +3121,187 @@
       </p:sp>
       <p:sp>
         <p:nvSpPr>
-          <p:cNvPr id="3" name="TextBox 3"/>
+          <p:cNvPr id="3" name="Freeform 3"/>
+          <p:cNvSpPr/>
+          <p:nvPr/>
+        </p:nvSpPr>
+        <p:spPr>
+          <a:xfrm>
+            <a:off x="447675" y="447675"/>
+            <a:ext cx="11296650" cy="5962650"/>
+          </a:xfrm>
+          <a:custGeom>
+            <a:avLst/>
+            <a:gdLst/>
+            <a:ahLst/>
+            <a:cxnLst/>
+            <a:rect l="l" t="t" r="r" b="b"/>
+            <a:pathLst>
+              <a:path w="11296650" h="5962650">
+                <a:moveTo>
+                  <a:pt x="0" y="0"/>
+                </a:moveTo>
+                <a:lnTo>
+                  <a:pt x="11296650" y="0"/>
+                </a:lnTo>
+                <a:lnTo>
+                  <a:pt x="11296650" y="5962650"/>
+                </a:lnTo>
+                <a:lnTo>
+                  <a:pt x="0" y="5962650"/>
+                </a:lnTo>
+                <a:close/>
+              </a:path>
+            </a:pathLst>
+          </a:custGeom>
+          <a:solidFill>
+            <a:srgbClr val="E9ECEF"/>
+          </a:solidFill>
+          <a:ln w="19050">
+            <a:solidFill>
+              <a:srgbClr val="DEE2E6"/>
+            </a:solidFill>
+          </a:ln>
+        </p:spPr>
+      </p:sp>
+      <p:sp>
+        <p:nvSpPr>
+          <p:cNvPr id="4" name="Ellipse 4"/>
+          <p:cNvSpPr/>
+          <p:nvPr/>
+        </p:nvSpPr>
+        <p:spPr>
+          <a:xfrm>
+            <a:off x="4953000" y="2286000"/>
+            <a:ext cx="2286000" cy="2286000"/>
+          </a:xfrm>
+          <a:prstGeom prst="ellipse">
+            <a:avLst/>
+          </a:prstGeom>
+          <a:solidFill>
+            <a:srgbClr val="0066CC">
+              <a:alpha val="80000"/>
+            </a:srgbClr>
+          </a:solidFill>
+          <a:ln>
+            <a:noFill/>
+          </a:ln>
+        </p:spPr>
+      </p:sp>
+      <p:sp>
+        <p:nvSpPr>
+          <p:cNvPr id="5" name="Freeform 5"/>
+          <p:cNvSpPr/>
+          <p:nvPr/>
+        </p:nvSpPr>
+        <p:spPr>
+          <a:xfrm>
+            <a:off x="3619500" y="952500"/>
+            <a:ext cx="4953000" cy="4953000"/>
+          </a:xfrm>
+          <a:custGeom>
+            <a:avLst/>
+            <a:gdLst/>
+            <a:ahLst/>
+            <a:cxnLst/>
+            <a:rect l="l" t="t" r="r" b="b"/>
+            <a:pathLst>
+              <a:path w="4953000" h="4953000">
+                <a:moveTo>
+                  <a:pt x="2476500" y="0"/>
+                </a:moveTo>
+                <a:cubicBezTo>
+                  <a:pt x="1108767" y="0"/>
+                  <a:pt x="0" y="1108767"/>
+                  <a:pt x="0" y="2476500"/>
+                </a:cubicBezTo>
+                <a:cubicBezTo>
+                  <a:pt x="0" y="3844233"/>
+                  <a:pt x="1108767" y="4953000"/>
+                  <a:pt x="2476500" y="4953000"/>
+                </a:cubicBezTo>
+                <a:cubicBezTo>
+                  <a:pt x="3844233" y="4953000"/>
+                  <a:pt x="4953000" y="3844233"/>
+                  <a:pt x="4953000" y="2476500"/>
+                </a:cubicBezTo>
+                <a:cubicBezTo>
+                  <a:pt x="4953000" y="1108767"/>
+                  <a:pt x="3844233" y="0"/>
+                  <a:pt x="2476500" y="0"/>
+                </a:cubicBezTo>
+                <a:close/>
+                <a:moveTo>
+                  <a:pt x="2476500" y="1333500"/>
+                </a:moveTo>
+                <a:cubicBezTo>
+                  <a:pt x="3107761" y="1333500"/>
+                  <a:pt x="3619500" y="1845239"/>
+                  <a:pt x="3619500" y="2476500"/>
+                </a:cubicBezTo>
+                <a:cubicBezTo>
+                  <a:pt x="3619500" y="3107761"/>
+                  <a:pt x="3107761" y="3619500"/>
+                  <a:pt x="2476500" y="3619500"/>
+                </a:cubicBezTo>
+                <a:cubicBezTo>
+                  <a:pt x="1845239" y="3619500"/>
+                  <a:pt x="1333500" y="3107761"/>
+                  <a:pt x="1333500" y="2476500"/>
+                </a:cubicBezTo>
+                <a:cubicBezTo>
+                  <a:pt x="1333500" y="1845239"/>
+                  <a:pt x="1845239" y="1333500"/>
+                  <a:pt x="2476500" y="1333500"/>
+                </a:cubicBezTo>
+                <a:close/>
+              </a:path>
+            </a:pathLst>
+          </a:custGeom>
+          <a:solidFill>
+            <a:srgbClr val="FF4D4D">
+              <a:alpha val="30000"/>
+            </a:srgbClr>
+          </a:solidFill>
+          <a:ln>
+            <a:noFill/>
+          </a:ln>
+        </p:spPr>
+      </p:sp>
+      <p:sp>
+        <p:nvSpPr>
+          <p:cNvPr id="6" name="Rectangle 6"/>
+          <p:cNvSpPr/>
+          <p:nvPr/>
+        </p:nvSpPr>
+        <p:spPr>
+          <a:xfrm>
+            <a:off x="762000" y="762000"/>
+            <a:ext cx="3429000" cy="2667000"/>
+          </a:xfrm>
+          <a:prstGeom prst="rect">
+            <a:avLst/>
+          </a:prstGeom>
+          <a:solidFill>
+            <a:srgbClr val="F8F9FA"/>
+          </a:solidFill>
+          <a:ln w="9525">
+            <a:solidFill>
+              <a:srgbClr val="E9ECEF"/>
+            </a:solidFill>
+          </a:ln>
+        </p:spPr>
+      </p:sp>
+      <p:sp>
+        <p:nvSpPr>
+          <p:cNvPr id="7" name="TextBox 7"/>
           <p:cNvSpPr txBox="1"/>
           <p:nvPr/>
         </p:nvSpPr>
         <p:spPr>
           <a:xfrm>
-            <a:off x="424815" y="662940"/>
-            <a:ext cx="1425893" cy="365760"/>
+            <a:off x="967740" y="1024890"/>
+            <a:ext cx="2488625" cy="365760"/>
           </a:xfrm>
           <a:prstGeom prst="rect">
             <a:avLst/>
@@ -3152,27 +3327,67 @@
                 <a:ea typeface="Microsoft YaHei"/>
                 <a:cs typeface="Google Sans"/>
               </a:rPr>
-              <a:t>TEST SLIDE</a:t>
-            </a:r>
-          </a:p>
-        </p:txBody>
-      </p:sp>
-      <p:sp>
-        <p:nvSpPr>
-          <p:cNvPr id="4" name="Rectangle 4"/>
+              <a:t>85,000+ RESIDENTS</a:t>
+            </a:r>
+          </a:p>
+        </p:txBody>
+      </p:sp>
+      <p:sp>
+        <p:nvSpPr>
+          <p:cNvPr id="8" name="TextBox 8"/>
+          <p:cNvSpPr txBox="1"/>
+          <p:nvPr/>
+        </p:nvSpPr>
+        <p:spPr>
+          <a:xfrm>
+            <a:off x="967740" y="1253490"/>
+            <a:ext cx="2709453" cy="365760"/>
+          </a:xfrm>
+          <a:prstGeom prst="rect">
+            <a:avLst/>
+          </a:prstGeom>
+          <a:noFill/>
+          <a:ln>
+            <a:noFill/>
+          </a:ln>
+        </p:spPr>
+        <p:txBody>
+          <a:bodyPr wrap="none" lIns="0" tIns="0" rIns="0" bIns="0" anchor="t" anchorCtr="0">
+            <a:spAutoFit/>
+          </a:bodyPr>
+          <a:lstStyle/>
+          <a:p>
+            <a:pPr algn="l"/>
+            <a:r>
+              <a:rPr lang="zh-CN" sz="1800" b="1" dirty="0">
+                <a:solidFill>
+                  <a:srgbClr val="0066CC"/>
+                </a:solidFill>
+                <a:latin typeface="Google Sans"/>
+                <a:ea typeface="Microsoft YaHei"/>
+                <a:cs typeface="Google Sans"/>
+              </a:rPr>
+              <a:t>CURRENTLY UNSERVED</a:t>
+            </a:r>
+          </a:p>
+        </p:txBody>
+      </p:sp>
+      <p:sp>
+        <p:nvSpPr>
+          <p:cNvPr id="9" name="Rectangle 9"/>
           <p:cNvSpPr/>
           <p:nvPr/>
         </p:nvSpPr>
         <p:spPr>
           <a:xfrm>
-            <a:off x="447675" y="1238250"/>
-            <a:ext cx="11296650" cy="38100"/>
+            <a:off x="990600" y="1762125"/>
+            <a:ext cx="2971800" cy="9525"/>
           </a:xfrm>
           <a:prstGeom prst="rect">
             <a:avLst/>
           </a:prstGeom>
           <a:solidFill>
-            <a:srgbClr val="0066CC"/>
+            <a:srgbClr val="DEE2E6"/>
           </a:solidFill>
           <a:ln>
             <a:noFill/>
@@ -3181,36 +3396,14 @@
       </p:sp>
       <p:sp>
         <p:nvSpPr>
-          <p:cNvPr id="5" name="Rectangle 5"/>
-          <p:cNvSpPr/>
-          <p:nvPr/>
-        </p:nvSpPr>
-        <p:spPr>
-          <a:xfrm>
-            <a:off x="447675" y="1714500"/>
-            <a:ext cx="5524500" cy="1143000"/>
-          </a:xfrm>
-          <a:prstGeom prst="rect">
-            <a:avLst/>
-          </a:prstGeom>
-          <a:solidFill>
-            <a:srgbClr val="F8F9FA"/>
-          </a:solidFill>
-          <a:ln>
-            <a:noFill/>
-          </a:ln>
-        </p:spPr>
-      </p:sp>
-      <p:sp>
-        <p:nvSpPr>
-          <p:cNvPr id="6" name="TextBox 6"/>
+          <p:cNvPr id="10" name="TextBox 10"/>
           <p:cNvSpPr txBox="1"/>
           <p:nvPr/>
         </p:nvSpPr>
         <p:spPr>
           <a:xfrm>
-            <a:off x="662940" y="1934528"/>
-            <a:ext cx="807618" cy="213360"/>
+            <a:off x="977265" y="2020252"/>
+            <a:ext cx="2264850" cy="213360"/>
           </a:xfrm>
           <a:prstGeom prst="rect">
             <a:avLst/>
@@ -3236,21 +3429,187 @@
                 <a:ea typeface="Microsoft YaHei"/>
                 <a:cs typeface="Google Sans"/>
               </a:rPr>
-              <a:t>POINT ONE</a:t>
-            </a:r>
-          </a:p>
-        </p:txBody>
-      </p:sp>
-      <p:sp>
-        <p:nvSpPr>
-          <p:cNvPr id="7" name="TextBox 7"/>
+              <a:t>High density of disconnected</a:t>
+            </a:r>
+          </a:p>
+        </p:txBody>
+      </p:sp>
+      <p:sp>
+        <p:nvSpPr>
+          <p:cNvPr id="11" name="TextBox 11"/>
           <p:cNvSpPr txBox="1"/>
           <p:nvPr/>
         </p:nvSpPr>
         <p:spPr>
           <a:xfrm>
-            <a:off x="664845" y="2236470"/>
-            <a:ext cx="3539014" cy="182880"/>
+            <a:off x="977265" y="2172652"/>
+            <a:ext cx="1749585" cy="213360"/>
+          </a:xfrm>
+          <a:prstGeom prst="rect">
+            <a:avLst/>
+          </a:prstGeom>
+          <a:noFill/>
+          <a:ln>
+            <a:noFill/>
+          </a:ln>
+        </p:spPr>
+        <p:txBody>
+          <a:bodyPr wrap="none" lIns="0" tIns="0" rIns="0" bIns="0" anchor="t" anchorCtr="0">
+            <a:spAutoFit/>
+          </a:bodyPr>
+          <a:lstStyle/>
+          <a:p>
+            <a:pPr algn="l"/>
+            <a:r>
+              <a:rPr lang="zh-CN" sz="1050" b="1" dirty="0">
+                <a:solidFill>
+                  <a:srgbClr val="1A1A1A"/>
+                </a:solidFill>
+                <a:latin typeface="Google Sans"/>
+                <a:ea typeface="Microsoft YaHei"/>
+                <a:cs typeface="Google Sans"/>
+              </a:rPr>
+              <a:t>suburban settlements</a:t>
+            </a:r>
+          </a:p>
+        </p:txBody>
+      </p:sp>
+      <p:sp>
+        <p:nvSpPr>
+          <p:cNvPr id="12" name="TextBox 12"/>
+          <p:cNvSpPr txBox="1"/>
+          <p:nvPr/>
+        </p:nvSpPr>
+        <p:spPr>
+          <a:xfrm>
+            <a:off x="977265" y="2477452"/>
+            <a:ext cx="1612718" cy="213360"/>
+          </a:xfrm>
+          <a:prstGeom prst="rect">
+            <a:avLst/>
+          </a:prstGeom>
+          <a:noFill/>
+          <a:ln>
+            <a:noFill/>
+          </a:ln>
+        </p:spPr>
+        <p:txBody>
+          <a:bodyPr wrap="none" lIns="0" tIns="0" rIns="0" bIns="0" anchor="t" anchorCtr="0">
+            <a:spAutoFit/>
+          </a:bodyPr>
+          <a:lstStyle/>
+          <a:p>
+            <a:pPr algn="l"/>
+            <a:r>
+              <a:rPr lang="zh-CN" sz="1050" b="1" dirty="0">
+                <a:solidFill>
+                  <a:srgbClr val="1A1A1A"/>
+                </a:solidFill>
+                <a:latin typeface="Google Sans"/>
+                <a:ea typeface="Microsoft YaHei"/>
+                <a:cs typeface="Google Sans"/>
+              </a:rPr>
+              <a:t>Critical gap in public</a:t>
+            </a:r>
+          </a:p>
+        </p:txBody>
+      </p:sp>
+      <p:sp>
+        <p:nvSpPr>
+          <p:cNvPr id="13" name="TextBox 13"/>
+          <p:cNvSpPr txBox="1"/>
+          <p:nvPr/>
+        </p:nvSpPr>
+        <p:spPr>
+          <a:xfrm>
+            <a:off x="977265" y="2706052"/>
+            <a:ext cx="1363137" cy="213360"/>
+          </a:xfrm>
+          <a:prstGeom prst="rect">
+            <a:avLst/>
+          </a:prstGeom>
+          <a:noFill/>
+          <a:ln>
+            <a:noFill/>
+          </a:ln>
+        </p:spPr>
+        <p:txBody>
+          <a:bodyPr wrap="none" lIns="0" tIns="0" rIns="0" bIns="0" anchor="t" anchorCtr="0">
+            <a:spAutoFit/>
+          </a:bodyPr>
+          <a:lstStyle/>
+          <a:p>
+            <a:pPr algn="l"/>
+            <a:r>
+              <a:rPr lang="zh-CN" sz="1050" b="1" dirty="0">
+                <a:solidFill>
+                  <a:srgbClr val="1A1A1A"/>
+                </a:solidFill>
+                <a:latin typeface="Google Sans"/>
+                <a:ea typeface="Microsoft YaHei"/>
+                <a:cs typeface="Google Sans"/>
+              </a:rPr>
+              <a:t>transit coverage</a:t>
+            </a:r>
+          </a:p>
+        </p:txBody>
+      </p:sp>
+      <p:sp>
+        <p:nvSpPr>
+          <p:cNvPr id="14" name="Rectangle 14"/>
+          <p:cNvSpPr/>
+          <p:nvPr/>
+        </p:nvSpPr>
+        <p:spPr>
+          <a:xfrm>
+            <a:off x="762000" y="5486400"/>
+            <a:ext cx="2133600" cy="838200"/>
+          </a:xfrm>
+          <a:prstGeom prst="rect">
+            <a:avLst/>
+          </a:prstGeom>
+          <a:solidFill>
+            <a:srgbClr val="F8F9FA"/>
+          </a:solidFill>
+          <a:ln w="9525">
+            <a:solidFill>
+              <a:srgbClr val="E9ECEF"/>
+            </a:solidFill>
+          </a:ln>
+        </p:spPr>
+      </p:sp>
+      <p:sp>
+        <p:nvSpPr>
+          <p:cNvPr id="15" name="Ellipse 15"/>
+          <p:cNvSpPr/>
+          <p:nvPr/>
+        </p:nvSpPr>
+        <p:spPr>
+          <a:xfrm>
+            <a:off x="923925" y="5686425"/>
+            <a:ext cx="152400" cy="152400"/>
+          </a:xfrm>
+          <a:prstGeom prst="ellipse">
+            <a:avLst/>
+          </a:prstGeom>
+          <a:solidFill>
+            <a:srgbClr val="0066CC"/>
+          </a:solidFill>
+          <a:ln>
+            <a:noFill/>
+          </a:ln>
+        </p:spPr>
+      </p:sp>
+      <p:sp>
+        <p:nvSpPr>
+          <p:cNvPr id="16" name="TextBox 16"/>
+          <p:cNvSpPr txBox="1"/>
+          <p:nvPr/>
+        </p:nvSpPr>
+        <p:spPr>
+          <a:xfrm>
+            <a:off x="1207770" y="5694045"/>
+            <a:ext cx="785241" cy="182880"/>
           </a:xfrm>
           <a:prstGeom prst="rect">
             <a:avLst/>
@@ -3276,21 +3635,172 @@
                 <a:ea typeface="Microsoft YaHei"/>
                 <a:cs typeface="Google Sans"/>
               </a:rPr>
-              <a:t>Detailed explanation for the first key point goes here.</a:t>
-            </a:r>
-          </a:p>
-        </p:txBody>
-      </p:sp>
-      <p:sp>
-        <p:nvSpPr>
-          <p:cNvPr id="8" name="Rectangle 8"/>
+              <a:t>Served Area</a:t>
+            </a:r>
+          </a:p>
+        </p:txBody>
+      </p:sp>
+      <p:sp>
+        <p:nvSpPr>
+          <p:cNvPr id="17" name="Ellipse 17"/>
           <p:cNvSpPr/>
           <p:nvPr/>
         </p:nvSpPr>
         <p:spPr>
           <a:xfrm>
-            <a:off x="447675" y="3048000"/>
-            <a:ext cx="5524500" cy="1143000"/>
+            <a:off x="923925" y="5972175"/>
+            <a:ext cx="152400" cy="152400"/>
+          </a:xfrm>
+          <a:prstGeom prst="ellipse">
+            <a:avLst/>
+          </a:prstGeom>
+          <a:solidFill>
+            <a:srgbClr val="FF4D4D">
+              <a:alpha val="50000"/>
+            </a:srgbClr>
+          </a:solidFill>
+          <a:ln>
+            <a:noFill/>
+          </a:ln>
+        </p:spPr>
+      </p:sp>
+      <p:sp>
+        <p:nvSpPr>
+          <p:cNvPr id="18" name="TextBox 18"/>
+          <p:cNvSpPr txBox="1"/>
+          <p:nvPr/>
+        </p:nvSpPr>
+        <p:spPr>
+          <a:xfrm>
+            <a:off x="1207770" y="5998845"/>
+            <a:ext cx="1258443" cy="182880"/>
+          </a:xfrm>
+          <a:prstGeom prst="rect">
+            <a:avLst/>
+          </a:prstGeom>
+          <a:noFill/>
+          <a:ln>
+            <a:noFill/>
+          </a:ln>
+        </p:spPr>
+        <p:txBody>
+          <a:bodyPr wrap="none" lIns="0" tIns="0" rIns="0" bIns="0" anchor="t" anchorCtr="0">
+            <a:spAutoFit/>
+          </a:bodyPr>
+          <a:lstStyle/>
+          <a:p>
+            <a:pPr algn="l"/>
+            <a:r>
+              <a:rPr lang="zh-CN" sz="900" dirty="0">
+                <a:solidFill>
+                  <a:srgbClr val="1A1A1A"/>
+                </a:solidFill>
+                <a:latin typeface="Google Sans"/>
+                <a:ea typeface="Microsoft YaHei"/>
+                <a:cs typeface="Google Sans"/>
+              </a:rPr>
+              <a:t>Unserved Periphery</a:t>
+            </a:r>
+          </a:p>
+        </p:txBody>
+      </p:sp>
+    </p:spTree>
+  </p:cSld>
+  <p:clrMapOvr>
+    <a:masterClrMapping/>
+  </p:clrMapOvr>
+</p:sld>
+</file>
+
+<file path=ppt/slides/slide2.xml><?xml version="1.0" encoding="utf-8"?>
+<p:sld xmlns:a="http://schemas.openxmlformats.org/drawingml/2006/main" xmlns:r="http://schemas.openxmlformats.org/officeDocument/2006/relationships" xmlns:p="http://schemas.openxmlformats.org/presentationml/2006/main">
+  <p:cSld>
+    <p:spTree>
+      <p:nvGrpSpPr>
+        <p:cNvPr id="1" name=""/>
+        <p:cNvGrpSpPr/>
+        <p:nvPr/>
+      </p:nvGrpSpPr>
+      <p:grpSpPr>
+        <a:xfrm>
+          <a:off x="0" y="0"/>
+          <a:ext cx="0" cy="0"/>
+          <a:chOff x="0" y="0"/>
+          <a:chExt cx="0" cy="0"/>
+        </a:xfrm>
+      </p:grpSpPr>
+      <p:sp>
+        <p:nvSpPr>
+          <p:cNvPr id="2" name="Rectangle 2"/>
+          <p:cNvSpPr/>
+          <p:nvPr/>
+        </p:nvSpPr>
+        <p:spPr>
+          <a:xfrm>
+            <a:off x="447675" y="447675"/>
+            <a:ext cx="12192000" cy="6858000"/>
+          </a:xfrm>
+          <a:prstGeom prst="rect">
+            <a:avLst/>
+          </a:prstGeom>
+          <a:solidFill>
+            <a:srgbClr val="FFFFFF"/>
+          </a:solidFill>
+          <a:ln>
+            <a:noFill/>
+          </a:ln>
+        </p:spPr>
+      </p:sp>
+      <p:sp>
+        <p:nvSpPr>
+          <p:cNvPr id="3" name="TextBox 3"/>
+          <p:cNvSpPr txBox="1"/>
+          <p:nvPr/>
+        </p:nvSpPr>
+        <p:spPr>
+          <a:xfrm>
+            <a:off x="434340" y="643890"/>
+            <a:ext cx="5428393" cy="365760"/>
+          </a:xfrm>
+          <a:prstGeom prst="rect">
+            <a:avLst/>
+          </a:prstGeom>
+          <a:noFill/>
+          <a:ln>
+            <a:noFill/>
+          </a:ln>
+        </p:spPr>
+        <p:txBody>
+          <a:bodyPr wrap="none" lIns="0" tIns="0" rIns="0" bIns="0" anchor="t" anchorCtr="0">
+            <a:spAutoFit/>
+          </a:bodyPr>
+          <a:lstStyle/>
+          <a:p>
+            <a:pPr algn="l"/>
+            <a:r>
+              <a:rPr lang="zh-CN" sz="1800" b="1" dirty="0">
+                <a:solidFill>
+                  <a:srgbClr val="1A1A1A"/>
+                </a:solidFill>
+                <a:latin typeface="Google Sans"/>
+                <a:ea typeface="Microsoft YaHei"/>
+                <a:cs typeface="Google Sans"/>
+              </a:rPr>
+              <a:t>BUILDING A CONTINUOUS TRANSIT BACKBONE</a:t>
+            </a:r>
+          </a:p>
+        </p:txBody>
+      </p:sp>
+      <p:sp>
+        <p:nvSpPr>
+          <p:cNvPr id="4" name="Rectangle 4"/>
+          <p:cNvSpPr/>
+          <p:nvPr/>
+        </p:nvSpPr>
+        <p:spPr>
+          <a:xfrm>
+            <a:off x="457200" y="1143000"/>
+            <a:ext cx="6172200" cy="5257800"/>
           </a:xfrm>
           <a:prstGeom prst="rect">
             <a:avLst/>
@@ -3303,16 +3813,309 @@
           </a:ln>
         </p:spPr>
       </p:sp>
-      <p:sp>
-        <p:nvSpPr>
-          <p:cNvPr id="9" name="TextBox 9"/>
+      <p:grpSp>
+        <p:nvGrpSpPr>
+          <p:cNvPr id="9" name="Group 9"/>
+          <p:cNvGrpSpPr/>
+          <p:nvPr/>
+        </p:nvGrpSpPr>
+        <p:grpSpPr>
+          <a:xfrm>
+            <a:off x="1428750" y="1428750"/>
+            <a:ext cx="4286250" cy="3810000"/>
+            <a:chOff x="1428750" y="1428750"/>
+            <a:chExt cx="4286250" cy="3810000"/>
+          </a:xfrm>
+        </p:grpSpPr>
+        <p:sp>
+          <p:nvSpPr>
+            <p:cNvPr id="5" name="Freeform 5"/>
+            <p:cNvSpPr/>
+            <p:nvPr/>
+          </p:nvSpPr>
+          <p:spPr>
+            <a:xfrm>
+              <a:off x="1428750" y="2381250"/>
+              <a:ext cx="4286250" cy="1428750"/>
+            </a:xfrm>
+            <a:custGeom>
+              <a:avLst/>
+              <a:gdLst/>
+              <a:ahLst/>
+              <a:cxnLst/>
+              <a:rect l="l" t="t" r="r" b="b"/>
+              <a:pathLst>
+                <a:path w="4286250" h="1428750">
+                  <a:moveTo>
+                    <a:pt x="0" y="0"/>
+                  </a:moveTo>
+                  <a:lnTo>
+                    <a:pt x="1905000" y="0"/>
+                  </a:lnTo>
+                  <a:lnTo>
+                    <a:pt x="2857500" y="1428750"/>
+                  </a:lnTo>
+                  <a:lnTo>
+                    <a:pt x="4286250" y="1428750"/>
+                  </a:lnTo>
+                </a:path>
+              </a:pathLst>
+            </a:custGeom>
+            <a:noFill/>
+            <a:ln w="38100" cap="rnd">
+              <a:solidFill>
+                <a:srgbClr val="D1D1D1"/>
+              </a:solidFill>
+            </a:ln>
+          </p:spPr>
+        </p:sp>
+        <p:sp>
+          <p:nvSpPr>
+            <p:cNvPr id="6" name="Freeform 6"/>
+            <p:cNvSpPr/>
+            <p:nvPr/>
+          </p:nvSpPr>
+          <p:spPr>
+            <a:xfrm>
+              <a:off x="2381250" y="1428750"/>
+              <a:ext cx="9525" cy="3810000"/>
+            </a:xfrm>
+            <a:custGeom>
+              <a:avLst/>
+              <a:gdLst/>
+              <a:ahLst/>
+              <a:cxnLst/>
+              <a:rect l="l" t="t" r="r" b="b"/>
+              <a:pathLst>
+                <a:path w="9525" h="3810000">
+                  <a:moveTo>
+                    <a:pt x="0" y="0"/>
+                  </a:moveTo>
+                  <a:lnTo>
+                    <a:pt x="0" y="3810000"/>
+                  </a:lnTo>
+                </a:path>
+              </a:pathLst>
+            </a:custGeom>
+            <a:noFill/>
+            <a:ln w="38100" cap="rnd">
+              <a:solidFill>
+                <a:srgbClr val="D1D1D1"/>
+              </a:solidFill>
+            </a:ln>
+          </p:spPr>
+        </p:sp>
+        <p:sp>
+          <p:nvSpPr>
+            <p:cNvPr id="7" name="Freeform 7"/>
+            <p:cNvSpPr/>
+            <p:nvPr/>
+          </p:nvSpPr>
+          <p:spPr>
+            <a:xfrm>
+              <a:off x="4286250" y="3810000"/>
+              <a:ext cx="952500" cy="1428750"/>
+            </a:xfrm>
+            <a:custGeom>
+              <a:avLst/>
+              <a:gdLst/>
+              <a:ahLst/>
+              <a:cxnLst/>
+              <a:rect l="l" t="t" r="r" b="b"/>
+              <a:pathLst>
+                <a:path w="952500" h="1428750">
+                  <a:moveTo>
+                    <a:pt x="0" y="0"/>
+                  </a:moveTo>
+                  <a:lnTo>
+                    <a:pt x="952500" y="1428750"/>
+                  </a:lnTo>
+                </a:path>
+              </a:pathLst>
+            </a:custGeom>
+            <a:noFill/>
+            <a:ln w="38100" cap="rnd">
+              <a:solidFill>
+                <a:srgbClr val="0066CC"/>
+              </a:solidFill>
+            </a:ln>
+          </p:spPr>
+        </p:sp>
+        <p:sp>
+          <p:nvSpPr>
+            <p:cNvPr id="8" name="Freeform 8"/>
+            <p:cNvSpPr/>
+            <p:nvPr/>
+          </p:nvSpPr>
+          <p:spPr>
+            <a:xfrm>
+              <a:off x="3333750" y="2381250"/>
+              <a:ext cx="1428750" cy="9525"/>
+            </a:xfrm>
+            <a:custGeom>
+              <a:avLst/>
+              <a:gdLst/>
+              <a:ahLst/>
+              <a:cxnLst/>
+              <a:rect l="l" t="t" r="r" b="b"/>
+              <a:pathLst>
+                <a:path w="1428750" h="9525">
+                  <a:moveTo>
+                    <a:pt x="0" y="0"/>
+                  </a:moveTo>
+                  <a:lnTo>
+                    <a:pt x="1428750" y="0"/>
+                  </a:lnTo>
+                </a:path>
+              </a:pathLst>
+            </a:custGeom>
+            <a:noFill/>
+            <a:ln w="38100" cap="rnd">
+              <a:solidFill>
+                <a:srgbClr val="0066CC"/>
+              </a:solidFill>
+            </a:ln>
+          </p:spPr>
+        </p:sp>
+      </p:grpSp>
+      <p:sp>
+        <p:nvSpPr>
+          <p:cNvPr id="10" name="Ellipse 10"/>
+          <p:cNvSpPr/>
+          <p:nvPr/>
+        </p:nvSpPr>
+        <p:spPr>
+          <a:xfrm>
+            <a:off x="2305050" y="2305050"/>
+            <a:ext cx="152400" cy="152400"/>
+          </a:xfrm>
+          <a:prstGeom prst="ellipse">
+            <a:avLst/>
+          </a:prstGeom>
+          <a:solidFill>
+            <a:srgbClr val="0066CC"/>
+          </a:solidFill>
+          <a:ln>
+            <a:noFill/>
+          </a:ln>
+        </p:spPr>
+      </p:sp>
+      <p:sp>
+        <p:nvSpPr>
+          <p:cNvPr id="11" name="Ellipse 11"/>
+          <p:cNvSpPr/>
+          <p:nvPr/>
+        </p:nvSpPr>
+        <p:spPr>
+          <a:xfrm>
+            <a:off x="4210050" y="3733800"/>
+            <a:ext cx="152400" cy="152400"/>
+          </a:xfrm>
+          <a:prstGeom prst="ellipse">
+            <a:avLst/>
+          </a:prstGeom>
+          <a:solidFill>
+            <a:srgbClr val="0066CC"/>
+          </a:solidFill>
+          <a:ln>
+            <a:noFill/>
+          </a:ln>
+        </p:spPr>
+      </p:sp>
+      <p:sp>
+        <p:nvSpPr>
+          <p:cNvPr id="12" name="Ellipse 12"/>
+          <p:cNvSpPr/>
+          <p:nvPr/>
+        </p:nvSpPr>
+        <p:spPr>
+          <a:xfrm>
+            <a:off x="5162550" y="5162550"/>
+            <a:ext cx="152400" cy="152400"/>
+          </a:xfrm>
+          <a:prstGeom prst="ellipse">
+            <a:avLst/>
+          </a:prstGeom>
+          <a:solidFill>
+            <a:srgbClr val="0066CC"/>
+          </a:solidFill>
+          <a:ln>
+            <a:noFill/>
+          </a:ln>
+        </p:spPr>
+      </p:sp>
+      <p:sp>
+        <p:nvSpPr>
+          <p:cNvPr id="13" name="TextBox 13"/>
           <p:cNvSpPr txBox="1"/>
           <p:nvPr/>
         </p:nvSpPr>
         <p:spPr>
           <a:xfrm>
-            <a:off x="662940" y="3268028"/>
-            <a:ext cx="839822" cy="213360"/>
+            <a:off x="600075" y="6091238"/>
+            <a:ext cx="3748802" cy="152400"/>
+          </a:xfrm>
+          <a:prstGeom prst="rect">
+            <a:avLst/>
+          </a:prstGeom>
+          <a:noFill/>
+          <a:ln>
+            <a:noFill/>
+          </a:ln>
+        </p:spPr>
+        <p:txBody>
+          <a:bodyPr wrap="none" lIns="0" tIns="0" rIns="0" bIns="0" anchor="t" anchorCtr="0">
+            <a:spAutoFit/>
+          </a:bodyPr>
+          <a:lstStyle/>
+          <a:p>
+            <a:pPr algn="l"/>
+            <a:r>
+              <a:rPr lang="zh-CN" sz="750" dirty="0">
+                <a:solidFill>
+                  <a:srgbClr val="808080"/>
+                </a:solidFill>
+                <a:latin typeface="Google Sans"/>
+                <a:ea typeface="Microsoft YaHei"/>
+                <a:cs typeface="Google Sans"/>
+              </a:rPr>
+              <a:t>Proposed network expansion (Blue) vs existing infrastructure (Grey)</a:t>
+            </a:r>
+          </a:p>
+        </p:txBody>
+      </p:sp>
+      <p:sp>
+        <p:nvSpPr>
+          <p:cNvPr id="14" name="Rectangle 14"/>
+          <p:cNvSpPr/>
+          <p:nvPr/>
+        </p:nvSpPr>
+        <p:spPr>
+          <a:xfrm>
+            <a:off x="6934200" y="1143000"/>
+            <a:ext cx="4800600" cy="2438400"/>
+          </a:xfrm>
+          <a:prstGeom prst="rect">
+            <a:avLst/>
+          </a:prstGeom>
+          <a:solidFill>
+            <a:srgbClr val="F8F9FA"/>
+          </a:solidFill>
+          <a:ln>
+            <a:noFill/>
+          </a:ln>
+        </p:spPr>
+      </p:sp>
+      <p:sp>
+        <p:nvSpPr>
+          <p:cNvPr id="15" name="TextBox 15"/>
+          <p:cNvSpPr txBox="1"/>
+          <p:nvPr/>
+        </p:nvSpPr>
+        <p:spPr>
+          <a:xfrm>
+            <a:off x="7149465" y="1486852"/>
+            <a:ext cx="1709330" cy="213360"/>
           </a:xfrm>
           <a:prstGeom prst="rect">
             <a:avLst/>
@@ -3338,21 +4141,21 @@
                 <a:ea typeface="Microsoft YaHei"/>
                 <a:cs typeface="Google Sans"/>
               </a:rPr>
-              <a:t>POINT TWO</a:t>
-            </a:r>
-          </a:p>
-        </p:txBody>
-      </p:sp>
-      <p:sp>
-        <p:nvSpPr>
-          <p:cNvPr id="10" name="TextBox 10"/>
+              <a:t>INTEGRATION STRATEGY</a:t>
+            </a:r>
+          </a:p>
+        </p:txBody>
+      </p:sp>
+      <p:sp>
+        <p:nvSpPr>
+          <p:cNvPr id="16" name="TextBox 16"/>
           <p:cNvSpPr txBox="1"/>
           <p:nvPr/>
         </p:nvSpPr>
         <p:spPr>
           <a:xfrm>
-            <a:off x="664845" y="3569970"/>
-            <a:ext cx="3644170" cy="182880"/>
+            <a:off x="7151370" y="1807845"/>
+            <a:ext cx="7771543" cy="182880"/>
           </a:xfrm>
           <a:prstGeom prst="rect">
             <a:avLst/>
@@ -3378,45 +4181,54 @@
                 <a:ea typeface="Microsoft YaHei"/>
                 <a:cs typeface="Google Sans"/>
               </a:rPr>
-              <a:t>Detailed explanation for the second key point goes here.</a:t>
-            </a:r>
-          </a:p>
-        </p:txBody>
-      </p:sp>
-      <p:sp>
-        <p:nvSpPr>
-          <p:cNvPr id="11" name="Ellipse 11"/>
+              <a:t>Integrating existing BRT corridors with new dedicated bus lanes</a:t>
+            </a:r>
+            <a:r>
+              <a:rPr lang="zh-CN" sz="900" dirty="0">
+                <a:solidFill>
+                  <a:srgbClr val="1A1A1A"/>
+                </a:solidFill>
+                <a:latin typeface="Google Sans"/>
+                <a:ea typeface="Microsoft YaHei"/>
+                <a:cs typeface="Google Sans"/>
+              </a:rPr>
+              <a:t>to eliminate bottlenecks and ensure seamless transfers.</a:t>
+            </a:r>
+          </a:p>
+        </p:txBody>
+      </p:sp>
+      <p:sp>
+        <p:nvSpPr>
+          <p:cNvPr id="17" name="Rectangle 17"/>
           <p:cNvSpPr/>
           <p:nvPr/>
         </p:nvSpPr>
         <p:spPr>
           <a:xfrm>
-            <a:off x="7620000" y="2000250"/>
-            <a:ext cx="2857500" cy="2857500"/>
-          </a:xfrm>
-          <a:prstGeom prst="ellipse">
+            <a:off x="6934200" y="3810000"/>
+            <a:ext cx="4800600" cy="2590800"/>
+          </a:xfrm>
+          <a:prstGeom prst="rect">
             <a:avLst/>
           </a:prstGeom>
           <a:solidFill>
             <a:srgbClr val="F8F9FA"/>
           </a:solidFill>
-          <a:ln w="19050">
-            <a:solidFill>
-              <a:srgbClr val="0066CC"/>
-            </a:solidFill>
+          <a:ln>
+            <a:noFill/>
           </a:ln>
         </p:spPr>
       </p:sp>
       <p:sp>
         <p:nvSpPr>
-          <p:cNvPr id="12" name="TextBox 12"/>
+          <p:cNvPr id="18" name="TextBox 18"/>
           <p:cNvSpPr txBox="1"/>
           <p:nvPr/>
         </p:nvSpPr>
         <p:spPr>
           <a:xfrm>
-            <a:off x="8791763" y="3120390"/>
-            <a:ext cx="513974" cy="670560"/>
+            <a:off x="7149465" y="4153852"/>
+            <a:ext cx="1282627" cy="213360"/>
           </a:xfrm>
           <a:prstGeom prst="rect">
             <a:avLst/>
@@ -3432,7 +4244,324 @@
           </a:bodyPr>
           <a:lstStyle/>
           <a:p>
-            <a:pPr algn="ctr"/>
+            <a:pPr algn="l"/>
+            <a:r>
+              <a:rPr lang="zh-CN" sz="1050" b="1" dirty="0">
+                <a:solidFill>
+                  <a:srgbClr val="1A1A1A"/>
+                </a:solidFill>
+                <a:latin typeface="Google Sans"/>
+                <a:ea typeface="Microsoft YaHei"/>
+                <a:cs typeface="Google Sans"/>
+              </a:rPr>
+              <a:t>NETWORK IMPACT</a:t>
+            </a:r>
+          </a:p>
+        </p:txBody>
+      </p:sp>
+      <p:sp>
+        <p:nvSpPr>
+          <p:cNvPr id="19" name="TextBox 19"/>
+          <p:cNvSpPr txBox="1"/>
+          <p:nvPr/>
+        </p:nvSpPr>
+        <p:spPr>
+          <a:xfrm>
+            <a:off x="7151370" y="4474845"/>
+            <a:ext cx="10255853" cy="182880"/>
+          </a:xfrm>
+          <a:prstGeom prst="rect">
+            <a:avLst/>
+          </a:prstGeom>
+          <a:noFill/>
+          <a:ln>
+            <a:noFill/>
+          </a:ln>
+        </p:spPr>
+        <p:txBody>
+          <a:bodyPr wrap="none" lIns="0" tIns="0" rIns="0" bIns="0" anchor="t" anchorCtr="0">
+            <a:spAutoFit/>
+          </a:bodyPr>
+          <a:lstStyle/>
+          <a:p>
+            <a:pPr algn="l"/>
+            <a:r>
+              <a:rPr lang="zh-CN" sz="900" dirty="0">
+                <a:solidFill>
+                  <a:srgbClr val="1A1A1A"/>
+                </a:solidFill>
+                <a:latin typeface="Google Sans"/>
+                <a:ea typeface="Microsoft YaHei"/>
+                <a:cs typeface="Google Sans"/>
+              </a:rPr>
+              <a:t>• Focus on network connectivity across urban zones.</a:t>
+            </a:r>
+            <a:r>
+              <a:rPr lang="zh-CN" sz="900" dirty="0">
+                <a:solidFill>
+                  <a:srgbClr val="1A1A1A"/>
+                </a:solidFill>
+                <a:latin typeface="Google Sans"/>
+                <a:ea typeface="Microsoft YaHei"/>
+                <a:cs typeface="Google Sans"/>
+              </a:rPr>
+              <a:t>• Reduced intervals through synchronized scheduling.</a:t>
+            </a:r>
+            <a:r>
+              <a:rPr lang="zh-CN" sz="900" dirty="0">
+                <a:solidFill>
+                  <a:srgbClr val="1A1A1A"/>
+                </a:solidFill>
+                <a:latin typeface="Google Sans"/>
+                <a:ea typeface="Microsoft YaHei"/>
+                <a:cs typeface="Google Sans"/>
+              </a:rPr>
+              <a:t>• Enhanced passenger throughput during peak hours.</a:t>
+            </a:r>
+          </a:p>
+        </p:txBody>
+      </p:sp>
+    </p:spTree>
+  </p:cSld>
+  <p:clrMapOvr>
+    <a:masterClrMapping/>
+  </p:clrMapOvr>
+</p:sld>
+</file>
+
+<file path=ppt/slides/slide3.xml><?xml version="1.0" encoding="utf-8"?>
+<p:sld xmlns:a="http://schemas.openxmlformats.org/drawingml/2006/main" xmlns:r="http://schemas.openxmlformats.org/officeDocument/2006/relationships" xmlns:p="http://schemas.openxmlformats.org/presentationml/2006/main">
+  <p:cSld>
+    <p:spTree>
+      <p:nvGrpSpPr>
+        <p:cNvPr id="1" name=""/>
+        <p:cNvGrpSpPr/>
+        <p:nvPr/>
+      </p:nvGrpSpPr>
+      <p:grpSpPr>
+        <a:xfrm>
+          <a:off x="0" y="0"/>
+          <a:ext cx="0" cy="0"/>
+          <a:chOff x="0" y="0"/>
+          <a:chExt cx="0" cy="0"/>
+        </a:xfrm>
+      </p:grpSpPr>
+      <p:sp>
+        <p:nvSpPr>
+          <p:cNvPr id="2" name="Rectangle 2"/>
+          <p:cNvSpPr/>
+          <p:nvPr/>
+        </p:nvSpPr>
+        <p:spPr>
+          <a:xfrm>
+            <a:off x="447675" y="447675"/>
+            <a:ext cx="12192000" cy="6858000"/>
+          </a:xfrm>
+          <a:prstGeom prst="rect">
+            <a:avLst/>
+          </a:prstGeom>
+          <a:solidFill>
+            <a:srgbClr val="FFFFFF"/>
+          </a:solidFill>
+          <a:ln>
+            <a:noFill/>
+          </a:ln>
+        </p:spPr>
+      </p:sp>
+      <p:sp>
+        <p:nvSpPr>
+          <p:cNvPr id="3" name="TextBox 3"/>
+          <p:cNvSpPr txBox="1"/>
+          <p:nvPr/>
+        </p:nvSpPr>
+        <p:spPr>
+          <a:xfrm>
+            <a:off x="434340" y="643890"/>
+            <a:ext cx="3979212" cy="365760"/>
+          </a:xfrm>
+          <a:prstGeom prst="rect">
+            <a:avLst/>
+          </a:prstGeom>
+          <a:noFill/>
+          <a:ln>
+            <a:noFill/>
+          </a:ln>
+        </p:spPr>
+        <p:txBody>
+          <a:bodyPr wrap="none" lIns="0" tIns="0" rIns="0" bIns="0" anchor="t" anchorCtr="0">
+            <a:spAutoFit/>
+          </a:bodyPr>
+          <a:lstStyle/>
+          <a:p>
+            <a:pPr algn="l"/>
+            <a:r>
+              <a:rPr lang="zh-CN" sz="1800" b="1" dirty="0">
+                <a:solidFill>
+                  <a:srgbClr val="1A1A1A"/>
+                </a:solidFill>
+                <a:latin typeface="Google Sans"/>
+                <a:ea typeface="Microsoft YaHei"/>
+                <a:cs typeface="Google Sans"/>
+              </a:rPr>
+              <a:t>2026 MICROMOBILITY ROADMAP</a:t>
+            </a:r>
+          </a:p>
+        </p:txBody>
+      </p:sp>
+      <p:sp>
+        <p:nvSpPr>
+          <p:cNvPr id="4" name="Rectangle 4"/>
+          <p:cNvSpPr/>
+          <p:nvPr/>
+        </p:nvSpPr>
+        <p:spPr>
+          <a:xfrm>
+            <a:off x="457200" y="1219200"/>
+            <a:ext cx="5486400" cy="2438400"/>
+          </a:xfrm>
+          <a:prstGeom prst="rect">
+            <a:avLst/>
+          </a:prstGeom>
+          <a:solidFill>
+            <a:srgbClr val="F8F9FA"/>
+          </a:solidFill>
+          <a:ln>
+            <a:noFill/>
+          </a:ln>
+        </p:spPr>
+      </p:sp>
+      <p:sp>
+        <p:nvSpPr>
+          <p:cNvPr id="5" name="Rectangle 5"/>
+          <p:cNvSpPr/>
+          <p:nvPr/>
+        </p:nvSpPr>
+        <p:spPr>
+          <a:xfrm>
+            <a:off x="6248400" y="1219200"/>
+            <a:ext cx="5486400" cy="2438400"/>
+          </a:xfrm>
+          <a:prstGeom prst="rect">
+            <a:avLst/>
+          </a:prstGeom>
+          <a:solidFill>
+            <a:srgbClr val="F8F9FA"/>
+          </a:solidFill>
+          <a:ln>
+            <a:noFill/>
+          </a:ln>
+        </p:spPr>
+      </p:sp>
+      <p:sp>
+        <p:nvSpPr>
+          <p:cNvPr id="6" name="Rectangle 6"/>
+          <p:cNvSpPr/>
+          <p:nvPr/>
+        </p:nvSpPr>
+        <p:spPr>
+          <a:xfrm>
+            <a:off x="457200" y="3886200"/>
+            <a:ext cx="5486400" cy="2438400"/>
+          </a:xfrm>
+          <a:prstGeom prst="rect">
+            <a:avLst/>
+          </a:prstGeom>
+          <a:solidFill>
+            <a:srgbClr val="F8F9FA"/>
+          </a:solidFill>
+          <a:ln>
+            <a:noFill/>
+          </a:ln>
+        </p:spPr>
+      </p:sp>
+      <p:sp>
+        <p:nvSpPr>
+          <p:cNvPr id="7" name="Rectangle 7"/>
+          <p:cNvSpPr/>
+          <p:nvPr/>
+        </p:nvSpPr>
+        <p:spPr>
+          <a:xfrm>
+            <a:off x="6248400" y="3886200"/>
+            <a:ext cx="5486400" cy="2438400"/>
+          </a:xfrm>
+          <a:prstGeom prst="rect">
+            <a:avLst/>
+          </a:prstGeom>
+          <a:solidFill>
+            <a:srgbClr val="F8F9FA"/>
+          </a:solidFill>
+          <a:ln>
+            <a:noFill/>
+          </a:ln>
+        </p:spPr>
+      </p:sp>
+      <p:sp>
+        <p:nvSpPr>
+          <p:cNvPr id="8" name="TextBox 8"/>
+          <p:cNvSpPr txBox="1"/>
+          <p:nvPr/>
+        </p:nvSpPr>
+        <p:spPr>
+          <a:xfrm>
+            <a:off x="672465" y="1563052"/>
+            <a:ext cx="1226270" cy="213360"/>
+          </a:xfrm>
+          <a:prstGeom prst="rect">
+            <a:avLst/>
+          </a:prstGeom>
+          <a:noFill/>
+          <a:ln>
+            <a:noFill/>
+          </a:ln>
+        </p:spPr>
+        <p:txBody>
+          <a:bodyPr wrap="none" lIns="0" tIns="0" rIns="0" bIns="0" anchor="t" anchorCtr="0">
+            <a:spAutoFit/>
+          </a:bodyPr>
+          <a:lstStyle/>
+          <a:p>
+            <a:pPr algn="l"/>
+            <a:r>
+              <a:rPr lang="zh-CN" sz="1050" b="1" dirty="0">
+                <a:solidFill>
+                  <a:srgbClr val="1A1A1A"/>
+                </a:solidFill>
+                <a:latin typeface="Google Sans"/>
+                <a:ea typeface="Microsoft YaHei"/>
+                <a:cs typeface="Google Sans"/>
+              </a:rPr>
+              <a:t>INFRASTRUCTURE</a:t>
+            </a:r>
+          </a:p>
+        </p:txBody>
+      </p:sp>
+      <p:sp>
+        <p:nvSpPr>
+          <p:cNvPr id="9" name="TextBox 9"/>
+          <p:cNvSpPr txBox="1"/>
+          <p:nvPr/>
+        </p:nvSpPr>
+        <p:spPr>
+          <a:xfrm>
+            <a:off x="643890" y="1853565"/>
+            <a:ext cx="1298372" cy="670560"/>
+          </a:xfrm>
+          <a:prstGeom prst="rect">
+            <a:avLst/>
+          </a:prstGeom>
+          <a:noFill/>
+          <a:ln>
+            <a:noFill/>
+          </a:ln>
+        </p:spPr>
+        <p:txBody>
+          <a:bodyPr wrap="none" lIns="0" tIns="0" rIns="0" bIns="0" anchor="t" anchorCtr="0">
+            <a:spAutoFit/>
+          </a:bodyPr>
+          <a:lstStyle/>
+          <a:p>
+            <a:pPr algn="l"/>
             <a:r>
               <a:rPr lang="zh-CN" sz="3300" b="1" dirty="0">
                 <a:solidFill>
@@ -3442,21 +4571,21 @@
                 <a:ea typeface="Microsoft YaHei"/>
                 <a:cs typeface="Google Sans"/>
               </a:rPr>
-              <a:t>01</a:t>
-            </a:r>
-          </a:p>
-        </p:txBody>
-      </p:sp>
-      <p:sp>
-        <p:nvSpPr>
-          <p:cNvPr id="13" name="TextBox 13"/>
+              <a:t>55km</a:t>
+            </a:r>
+          </a:p>
+        </p:txBody>
+      </p:sp>
+      <p:sp>
+        <p:nvSpPr>
+          <p:cNvPr id="10" name="TextBox 10"/>
           <p:cNvSpPr txBox="1"/>
           <p:nvPr/>
         </p:nvSpPr>
         <p:spPr>
           <a:xfrm>
-            <a:off x="8748951" y="3729038"/>
-            <a:ext cx="599599" cy="152400"/>
+            <a:off x="674370" y="2341245"/>
+            <a:ext cx="1619917" cy="182880"/>
           </a:xfrm>
           <a:prstGeom prst="rect">
             <a:avLst/>
@@ -3472,7 +4601,47 @@
           </a:bodyPr>
           <a:lstStyle/>
           <a:p>
-            <a:pPr algn="ctr"/>
+            <a:pPr algn="l"/>
+            <a:r>
+              <a:rPr lang="zh-CN" sz="900" dirty="0">
+                <a:solidFill>
+                  <a:srgbClr val="1A1A1A"/>
+                </a:solidFill>
+                <a:latin typeface="Google Sans"/>
+                <a:ea typeface="Microsoft YaHei"/>
+                <a:cs typeface="Google Sans"/>
+              </a:rPr>
+              <a:t>New protected bike lanes</a:t>
+            </a:r>
+          </a:p>
+        </p:txBody>
+      </p:sp>
+      <p:sp>
+        <p:nvSpPr>
+          <p:cNvPr id="11" name="TextBox 11"/>
+          <p:cNvSpPr txBox="1"/>
+          <p:nvPr/>
+        </p:nvSpPr>
+        <p:spPr>
+          <a:xfrm>
+            <a:off x="676275" y="2586038"/>
+            <a:ext cx="2511028" cy="152400"/>
+          </a:xfrm>
+          <a:prstGeom prst="rect">
+            <a:avLst/>
+          </a:prstGeom>
+          <a:noFill/>
+          <a:ln>
+            <a:noFill/>
+          </a:ln>
+        </p:spPr>
+        <p:txBody>
+          <a:bodyPr wrap="none" lIns="0" tIns="0" rIns="0" bIns="0" anchor="t" anchorCtr="0">
+            <a:spAutoFit/>
+          </a:bodyPr>
+          <a:lstStyle/>
+          <a:p>
+            <a:pPr algn="l"/>
             <a:r>
               <a:rPr lang="zh-CN" sz="750" dirty="0">
                 <a:solidFill>
@@ -3482,10 +4651,662 @@
                 <a:ea typeface="Microsoft YaHei"/>
                 <a:cs typeface="Google Sans"/>
               </a:rPr>
-              <a:t>VISUAL HINT</a:t>
-            </a:r>
-          </a:p>
-        </p:txBody>
+              <a:t>Expanding connectivity across urban corridors</a:t>
+            </a:r>
+          </a:p>
+        </p:txBody>
+      </p:sp>
+      <p:sp>
+        <p:nvSpPr>
+          <p:cNvPr id="12" name="TextBox 12"/>
+          <p:cNvSpPr txBox="1"/>
+          <p:nvPr/>
+        </p:nvSpPr>
+        <p:spPr>
+          <a:xfrm>
+            <a:off x="6539865" y="1563052"/>
+            <a:ext cx="1008893" cy="213360"/>
+          </a:xfrm>
+          <a:prstGeom prst="rect">
+            <a:avLst/>
+          </a:prstGeom>
+          <a:noFill/>
+          <a:ln>
+            <a:noFill/>
+          </a:ln>
+        </p:spPr>
+        <p:txBody>
+          <a:bodyPr wrap="none" lIns="0" tIns="0" rIns="0" bIns="0" anchor="t" anchorCtr="0">
+            <a:spAutoFit/>
+          </a:bodyPr>
+          <a:lstStyle/>
+          <a:p>
+            <a:pPr algn="l"/>
+            <a:r>
+              <a:rPr lang="zh-CN" sz="1050" b="1" dirty="0">
+                <a:solidFill>
+                  <a:srgbClr val="1A1A1A"/>
+                </a:solidFill>
+                <a:latin typeface="Google Sans"/>
+                <a:ea typeface="Microsoft YaHei"/>
+                <a:cs typeface="Google Sans"/>
+              </a:rPr>
+              <a:t>PARKING HUBS</a:t>
+            </a:r>
+          </a:p>
+        </p:txBody>
+      </p:sp>
+      <p:sp>
+        <p:nvSpPr>
+          <p:cNvPr id="13" name="TextBox 13"/>
+          <p:cNvSpPr txBox="1"/>
+          <p:nvPr/>
+        </p:nvSpPr>
+        <p:spPr>
+          <a:xfrm>
+            <a:off x="6511290" y="1853565"/>
+            <a:ext cx="1197159" cy="670560"/>
+          </a:xfrm>
+          <a:prstGeom prst="rect">
+            <a:avLst/>
+          </a:prstGeom>
+          <a:noFill/>
+          <a:ln>
+            <a:noFill/>
+          </a:ln>
+        </p:spPr>
+        <p:txBody>
+          <a:bodyPr wrap="none" lIns="0" tIns="0" rIns="0" bIns="0" anchor="t" anchorCtr="0">
+            <a:spAutoFit/>
+          </a:bodyPr>
+          <a:lstStyle/>
+          <a:p>
+            <a:pPr algn="l"/>
+            <a:r>
+              <a:rPr lang="zh-CN" sz="3300" b="1" dirty="0">
+                <a:solidFill>
+                  <a:srgbClr val="0066CC"/>
+                </a:solidFill>
+                <a:latin typeface="Google Sans"/>
+                <a:ea typeface="Microsoft YaHei"/>
+                <a:cs typeface="Google Sans"/>
+              </a:rPr>
+              <a:t>200+</a:t>
+            </a:r>
+          </a:p>
+        </p:txBody>
+      </p:sp>
+      <p:sp>
+        <p:nvSpPr>
+          <p:cNvPr id="14" name="TextBox 14"/>
+          <p:cNvSpPr txBox="1"/>
+          <p:nvPr/>
+        </p:nvSpPr>
+        <p:spPr>
+          <a:xfrm>
+            <a:off x="6541770" y="2341245"/>
+            <a:ext cx="1554194" cy="182880"/>
+          </a:xfrm>
+          <a:prstGeom prst="rect">
+            <a:avLst/>
+          </a:prstGeom>
+          <a:noFill/>
+          <a:ln>
+            <a:noFill/>
+          </a:ln>
+        </p:spPr>
+        <p:txBody>
+          <a:bodyPr wrap="none" lIns="0" tIns="0" rIns="0" bIns="0" anchor="t" anchorCtr="0">
+            <a:spAutoFit/>
+          </a:bodyPr>
+          <a:lstStyle/>
+          <a:p>
+            <a:pPr algn="l"/>
+            <a:r>
+              <a:rPr lang="zh-CN" sz="900" dirty="0">
+                <a:solidFill>
+                  <a:srgbClr val="1A1A1A"/>
+                </a:solidFill>
+                <a:latin typeface="Google Sans"/>
+                <a:ea typeface="Microsoft YaHei"/>
+                <a:cs typeface="Google Sans"/>
+              </a:rPr>
+              <a:t>Dedicated parking zones</a:t>
+            </a:r>
+          </a:p>
+        </p:txBody>
+      </p:sp>
+      <p:sp>
+        <p:nvSpPr>
+          <p:cNvPr id="15" name="TextBox 15"/>
+          <p:cNvSpPr txBox="1"/>
+          <p:nvPr/>
+        </p:nvSpPr>
+        <p:spPr>
+          <a:xfrm>
+            <a:off x="6543675" y="2586038"/>
+            <a:ext cx="2406968" cy="152400"/>
+          </a:xfrm>
+          <a:prstGeom prst="rect">
+            <a:avLst/>
+          </a:prstGeom>
+          <a:noFill/>
+          <a:ln>
+            <a:noFill/>
+          </a:ln>
+        </p:spPr>
+        <p:txBody>
+          <a:bodyPr wrap="none" lIns="0" tIns="0" rIns="0" bIns="0" anchor="t" anchorCtr="0">
+            <a:spAutoFit/>
+          </a:bodyPr>
+          <a:lstStyle/>
+          <a:p>
+            <a:pPr algn="l"/>
+            <a:r>
+              <a:rPr lang="zh-CN" sz="750" dirty="0">
+                <a:solidFill>
+                  <a:srgbClr val="808080"/>
+                </a:solidFill>
+                <a:latin typeface="Google Sans"/>
+                <a:ea typeface="Microsoft YaHei"/>
+                <a:cs typeface="Google Sans"/>
+              </a:rPr>
+              <a:t>Reducing sidewalk clutter and improving flow</a:t>
+            </a:r>
+          </a:p>
+        </p:txBody>
+      </p:sp>
+      <p:sp>
+        <p:nvSpPr>
+          <p:cNvPr id="16" name="TextBox 16"/>
+          <p:cNvSpPr txBox="1"/>
+          <p:nvPr/>
+        </p:nvSpPr>
+        <p:spPr>
+          <a:xfrm>
+            <a:off x="672465" y="4230052"/>
+            <a:ext cx="944485" cy="213360"/>
+          </a:xfrm>
+          <a:prstGeom prst="rect">
+            <a:avLst/>
+          </a:prstGeom>
+          <a:noFill/>
+          <a:ln>
+            <a:noFill/>
+          </a:ln>
+        </p:spPr>
+        <p:txBody>
+          <a:bodyPr wrap="none" lIns="0" tIns="0" rIns="0" bIns="0" anchor="t" anchorCtr="0">
+            <a:spAutoFit/>
+          </a:bodyPr>
+          <a:lstStyle/>
+          <a:p>
+            <a:pPr algn="l"/>
+            <a:r>
+              <a:rPr lang="zh-CN" sz="1050" b="1" dirty="0">
+                <a:solidFill>
+                  <a:srgbClr val="1A1A1A"/>
+                </a:solidFill>
+                <a:latin typeface="Google Sans"/>
+                <a:ea typeface="Microsoft YaHei"/>
+                <a:cs typeface="Google Sans"/>
+              </a:rPr>
+              <a:t>REGULATORY</a:t>
+            </a:r>
+          </a:p>
+        </p:txBody>
+      </p:sp>
+      <p:sp>
+        <p:nvSpPr>
+          <p:cNvPr id="17" name="TextBox 17"/>
+          <p:cNvSpPr txBox="1"/>
+          <p:nvPr/>
+        </p:nvSpPr>
+        <p:spPr>
+          <a:xfrm>
+            <a:off x="643890" y="4520565"/>
+            <a:ext cx="1070643" cy="670560"/>
+          </a:xfrm>
+          <a:prstGeom prst="rect">
+            <a:avLst/>
+          </a:prstGeom>
+          <a:noFill/>
+          <a:ln>
+            <a:noFill/>
+          </a:ln>
+        </p:spPr>
+        <p:txBody>
+          <a:bodyPr wrap="none" lIns="0" tIns="0" rIns="0" bIns="0" anchor="t" anchorCtr="0">
+            <a:spAutoFit/>
+          </a:bodyPr>
+          <a:lstStyle/>
+          <a:p>
+            <a:pPr algn="l"/>
+            <a:r>
+              <a:rPr lang="zh-CN" sz="3300" b="1" dirty="0">
+                <a:solidFill>
+                  <a:srgbClr val="0066CC"/>
+                </a:solidFill>
+                <a:latin typeface="Google Sans"/>
+                <a:ea typeface="Microsoft YaHei"/>
+                <a:cs typeface="Google Sans"/>
+              </a:rPr>
+              <a:t>100%</a:t>
+            </a:r>
+          </a:p>
+        </p:txBody>
+      </p:sp>
+      <p:sp>
+        <p:nvSpPr>
+          <p:cNvPr id="18" name="TextBox 18"/>
+          <p:cNvSpPr txBox="1"/>
+          <p:nvPr/>
+        </p:nvSpPr>
+        <p:spPr>
+          <a:xfrm>
+            <a:off x="674370" y="5084445"/>
+            <a:ext cx="1521333" cy="182880"/>
+          </a:xfrm>
+          <a:prstGeom prst="rect">
+            <a:avLst/>
+          </a:prstGeom>
+          <a:noFill/>
+          <a:ln>
+            <a:noFill/>
+          </a:ln>
+        </p:spPr>
+        <p:txBody>
+          <a:bodyPr wrap="none" lIns="0" tIns="0" rIns="0" bIns="0" anchor="t" anchorCtr="0">
+            <a:spAutoFit/>
+          </a:bodyPr>
+          <a:lstStyle/>
+          <a:p>
+            <a:pPr algn="l"/>
+            <a:r>
+              <a:rPr lang="zh-CN" sz="900" dirty="0">
+                <a:solidFill>
+                  <a:srgbClr val="1A1A1A"/>
+                </a:solidFill>
+                <a:latin typeface="Google Sans"/>
+                <a:ea typeface="Microsoft YaHei"/>
+                <a:cs typeface="Google Sans"/>
+              </a:rPr>
+              <a:t>Digital plate compliance</a:t>
+            </a:r>
+          </a:p>
+        </p:txBody>
+      </p:sp>
+      <p:sp>
+        <p:nvSpPr>
+          <p:cNvPr id="19" name="TextBox 19"/>
+          <p:cNvSpPr txBox="1"/>
+          <p:nvPr/>
+        </p:nvSpPr>
+        <p:spPr>
+          <a:xfrm>
+            <a:off x="676275" y="5253038"/>
+            <a:ext cx="2445306" cy="152400"/>
+          </a:xfrm>
+          <a:prstGeom prst="rect">
+            <a:avLst/>
+          </a:prstGeom>
+          <a:noFill/>
+          <a:ln>
+            <a:noFill/>
+          </a:ln>
+        </p:spPr>
+        <p:txBody>
+          <a:bodyPr wrap="none" lIns="0" tIns="0" rIns="0" bIns="0" anchor="t" anchorCtr="0">
+            <a:spAutoFit/>
+          </a:bodyPr>
+          <a:lstStyle/>
+          <a:p>
+            <a:pPr algn="l"/>
+            <a:r>
+              <a:rPr lang="zh-CN" sz="750" dirty="0">
+                <a:solidFill>
+                  <a:srgbClr val="808080"/>
+                </a:solidFill>
+                <a:latin typeface="Google Sans"/>
+                <a:ea typeface="Microsoft YaHei"/>
+                <a:cs typeface="Google Sans"/>
+              </a:rPr>
+              <a:t>Enhanced tracking and identification systems</a:t>
+            </a:r>
+          </a:p>
+        </p:txBody>
+      </p:sp>
+      <p:sp>
+        <p:nvSpPr>
+          <p:cNvPr id="20" name="TextBox 20"/>
+          <p:cNvSpPr txBox="1"/>
+          <p:nvPr/>
+        </p:nvSpPr>
+        <p:spPr>
+          <a:xfrm>
+            <a:off x="6539865" y="4230052"/>
+            <a:ext cx="1137709" cy="213360"/>
+          </a:xfrm>
+          <a:prstGeom prst="rect">
+            <a:avLst/>
+          </a:prstGeom>
+          <a:noFill/>
+          <a:ln>
+            <a:noFill/>
+          </a:ln>
+        </p:spPr>
+        <p:txBody>
+          <a:bodyPr wrap="none" lIns="0" tIns="0" rIns="0" bIns="0" anchor="t" anchorCtr="0">
+            <a:spAutoFit/>
+          </a:bodyPr>
+          <a:lstStyle/>
+          <a:p>
+            <a:pPr algn="l"/>
+            <a:r>
+              <a:rPr lang="zh-CN" sz="1050" b="1" dirty="0">
+                <a:solidFill>
+                  <a:srgbClr val="1A1A1A"/>
+                </a:solidFill>
+                <a:latin typeface="Google Sans"/>
+                <a:ea typeface="Microsoft YaHei"/>
+                <a:cs typeface="Google Sans"/>
+              </a:rPr>
+              <a:t>USER FEEDBACK</a:t>
+            </a:r>
+          </a:p>
+        </p:txBody>
+      </p:sp>
+      <p:sp>
+        <p:nvSpPr>
+          <p:cNvPr id="21" name="TextBox 21"/>
+          <p:cNvSpPr txBox="1"/>
+          <p:nvPr/>
+        </p:nvSpPr>
+        <p:spPr>
+          <a:xfrm>
+            <a:off x="6511290" y="4520565"/>
+            <a:ext cx="1197159" cy="670560"/>
+          </a:xfrm>
+          <a:prstGeom prst="rect">
+            <a:avLst/>
+          </a:prstGeom>
+          <a:noFill/>
+          <a:ln>
+            <a:noFill/>
+          </a:ln>
+        </p:spPr>
+        <p:txBody>
+          <a:bodyPr wrap="none" lIns="0" tIns="0" rIns="0" bIns="0" anchor="t" anchorCtr="0">
+            <a:spAutoFit/>
+          </a:bodyPr>
+          <a:lstStyle/>
+          <a:p>
+            <a:pPr algn="l"/>
+            <a:r>
+              <a:rPr lang="zh-CN" sz="3300" b="1" dirty="0">
+                <a:solidFill>
+                  <a:srgbClr val="0066CC"/>
+                </a:solidFill>
+                <a:latin typeface="Google Sans"/>
+                <a:ea typeface="Microsoft YaHei"/>
+                <a:cs typeface="Google Sans"/>
+              </a:rPr>
+              <a:t>24/7</a:t>
+            </a:r>
+          </a:p>
+        </p:txBody>
+      </p:sp>
+      <p:sp>
+        <p:nvSpPr>
+          <p:cNvPr id="22" name="TextBox 22"/>
+          <p:cNvSpPr txBox="1"/>
+          <p:nvPr/>
+        </p:nvSpPr>
+        <p:spPr>
+          <a:xfrm>
+            <a:off x="6541770" y="5084445"/>
+            <a:ext cx="1573911" cy="182880"/>
+          </a:xfrm>
+          <a:prstGeom prst="rect">
+            <a:avLst/>
+          </a:prstGeom>
+          <a:noFill/>
+          <a:ln>
+            <a:noFill/>
+          </a:ln>
+        </p:spPr>
+        <p:txBody>
+          <a:bodyPr wrap="none" lIns="0" tIns="0" rIns="0" bIns="0" anchor="t" anchorCtr="0">
+            <a:spAutoFit/>
+          </a:bodyPr>
+          <a:lstStyle/>
+          <a:p>
+            <a:pPr algn="l"/>
+            <a:r>
+              <a:rPr lang="zh-CN" sz="900" dirty="0">
+                <a:solidFill>
+                  <a:srgbClr val="1A1A1A"/>
+                </a:solidFill>
+                <a:latin typeface="Google Sans"/>
+                <a:ea typeface="Microsoft YaHei"/>
+                <a:cs typeface="Google Sans"/>
+              </a:rPr>
+              <a:t>Automated bot response</a:t>
+            </a:r>
+          </a:p>
+        </p:txBody>
+      </p:sp>
+      <p:sp>
+        <p:nvSpPr>
+          <p:cNvPr id="23" name="TextBox 23"/>
+          <p:cNvSpPr txBox="1"/>
+          <p:nvPr/>
+        </p:nvSpPr>
+        <p:spPr>
+          <a:xfrm>
+            <a:off x="6543675" y="5253038"/>
+            <a:ext cx="2176939" cy="152400"/>
+          </a:xfrm>
+          <a:prstGeom prst="rect">
+            <a:avLst/>
+          </a:prstGeom>
+          <a:noFill/>
+          <a:ln>
+            <a:noFill/>
+          </a:ln>
+        </p:spPr>
+        <p:txBody>
+          <a:bodyPr wrap="none" lIns="0" tIns="0" rIns="0" bIns="0" anchor="t" anchorCtr="0">
+            <a:spAutoFit/>
+          </a:bodyPr>
+          <a:lstStyle/>
+          <a:p>
+            <a:pPr algn="l"/>
+            <a:r>
+              <a:rPr lang="zh-CN" sz="750" dirty="0">
+                <a:solidFill>
+                  <a:srgbClr val="808080"/>
+                </a:solidFill>
+                <a:latin typeface="Google Sans"/>
+                <a:ea typeface="Microsoft YaHei"/>
+                <a:cs typeface="Google Sans"/>
+              </a:rPr>
+              <a:t>Real-time issue reporting and resolution</a:t>
+            </a:r>
+          </a:p>
+        </p:txBody>
+      </p:sp>
+      <p:sp>
+        <p:nvSpPr>
+          <p:cNvPr id="24" name="Freeform 24"/>
+          <p:cNvSpPr/>
+          <p:nvPr/>
+        </p:nvSpPr>
+        <p:spPr>
+          <a:xfrm>
+            <a:off x="5238750" y="1619250"/>
+            <a:ext cx="285750" cy="285750"/>
+          </a:xfrm>
+          <a:custGeom>
+            <a:avLst/>
+            <a:gdLst/>
+            <a:ahLst/>
+            <a:cxnLst/>
+            <a:rect l="l" t="t" r="r" b="b"/>
+            <a:pathLst>
+              <a:path w="285750" h="285750">
+                <a:moveTo>
+                  <a:pt x="0" y="0"/>
+                </a:moveTo>
+                <a:lnTo>
+                  <a:pt x="285750" y="0"/>
+                </a:lnTo>
+                <a:lnTo>
+                  <a:pt x="285750" y="285750"/>
+                </a:lnTo>
+                <a:lnTo>
+                  <a:pt x="0" y="285750"/>
+                </a:lnTo>
+                <a:close/>
+              </a:path>
+            </a:pathLst>
+          </a:custGeom>
+          <a:noFill/>
+          <a:ln w="19050">
+            <a:solidFill>
+              <a:srgbClr val="0066CC"/>
+            </a:solidFill>
+          </a:ln>
+        </p:spPr>
+      </p:sp>
+      <p:sp>
+        <p:nvSpPr>
+          <p:cNvPr id="25" name="Freeform 25"/>
+          <p:cNvSpPr/>
+          <p:nvPr/>
+        </p:nvSpPr>
+        <p:spPr>
+          <a:xfrm>
+            <a:off x="11049000" y="1619250"/>
+            <a:ext cx="285750" cy="285750"/>
+          </a:xfrm>
+          <a:custGeom>
+            <a:avLst/>
+            <a:gdLst/>
+            <a:ahLst/>
+            <a:cxnLst/>
+            <a:rect l="l" t="t" r="r" b="b"/>
+            <a:pathLst>
+              <a:path w="285750" h="285750">
+                <a:moveTo>
+                  <a:pt x="0" y="0"/>
+                </a:moveTo>
+                <a:lnTo>
+                  <a:pt x="285750" y="0"/>
+                </a:lnTo>
+                <a:lnTo>
+                  <a:pt x="285750" y="285750"/>
+                </a:lnTo>
+                <a:lnTo>
+                  <a:pt x="0" y="285750"/>
+                </a:lnTo>
+                <a:close/>
+              </a:path>
+            </a:pathLst>
+          </a:custGeom>
+          <a:noFill/>
+          <a:ln w="19050">
+            <a:solidFill>
+              <a:srgbClr val="0066CC"/>
+            </a:solidFill>
+          </a:ln>
+        </p:spPr>
+      </p:sp>
+      <p:sp>
+        <p:nvSpPr>
+          <p:cNvPr id="26" name="Freeform 26"/>
+          <p:cNvSpPr/>
+          <p:nvPr/>
+        </p:nvSpPr>
+        <p:spPr>
+          <a:xfrm>
+            <a:off x="5238750" y="4286250"/>
+            <a:ext cx="285750" cy="285750"/>
+          </a:xfrm>
+          <a:custGeom>
+            <a:avLst/>
+            <a:gdLst/>
+            <a:ahLst/>
+            <a:cxnLst/>
+            <a:rect l="l" t="t" r="r" b="b"/>
+            <a:pathLst>
+              <a:path w="285750" h="285750">
+                <a:moveTo>
+                  <a:pt x="0" y="0"/>
+                </a:moveTo>
+                <a:lnTo>
+                  <a:pt x="285750" y="0"/>
+                </a:lnTo>
+                <a:lnTo>
+                  <a:pt x="285750" y="285750"/>
+                </a:lnTo>
+                <a:lnTo>
+                  <a:pt x="0" y="285750"/>
+                </a:lnTo>
+                <a:close/>
+              </a:path>
+            </a:pathLst>
+          </a:custGeom>
+          <a:noFill/>
+          <a:ln w="19050">
+            <a:solidFill>
+              <a:srgbClr val="0066CC"/>
+            </a:solidFill>
+          </a:ln>
+        </p:spPr>
+      </p:sp>
+      <p:sp>
+        <p:nvSpPr>
+          <p:cNvPr id="27" name="Freeform 27"/>
+          <p:cNvSpPr/>
+          <p:nvPr/>
+        </p:nvSpPr>
+        <p:spPr>
+          <a:xfrm>
+            <a:off x="11049000" y="4286250"/>
+            <a:ext cx="285750" cy="285750"/>
+          </a:xfrm>
+          <a:custGeom>
+            <a:avLst/>
+            <a:gdLst/>
+            <a:ahLst/>
+            <a:cxnLst/>
+            <a:rect l="l" t="t" r="r" b="b"/>
+            <a:pathLst>
+              <a:path w="285750" h="285750">
+                <a:moveTo>
+                  <a:pt x="0" y="0"/>
+                </a:moveTo>
+                <a:lnTo>
+                  <a:pt x="285750" y="0"/>
+                </a:lnTo>
+                <a:lnTo>
+                  <a:pt x="285750" y="285750"/>
+                </a:lnTo>
+                <a:lnTo>
+                  <a:pt x="0" y="285750"/>
+                </a:lnTo>
+                <a:close/>
+              </a:path>
+            </a:pathLst>
+          </a:custGeom>
+          <a:noFill/>
+          <a:ln w="19050">
+            <a:solidFill>
+              <a:srgbClr val="0066CC"/>
+            </a:solidFill>
+          </a:ln>
+        </p:spPr>
       </p:sp>
     </p:spTree>
   </p:cSld>
